--- a/word-drafts/figures/WoTBinding-Fig1-Mapping.pptx
+++ b/word-drafts/figures/WoTBinding-Fig1-Mapping.pptx
@@ -3723,7 +3723,7 @@
         <p:spPr>
           <a:xfrm>
             <a:off x="2195512" y="3571875"/>
-            <a:ext cx="619125" cy="123825"/>
+            <a:ext cx="762000" cy="123825"/>
           </a:xfrm>
           <a:prstGeom prst="rect">
             <a:avLst/>
@@ -3794,7 +3794,7 @@
         <p:spPr>
           <a:xfrm>
             <a:off x="3481387" y="3571875"/>
-            <a:ext cx="619125" cy="123825"/>
+            <a:ext cx="762000" cy="123825"/>
           </a:xfrm>
           <a:prstGeom prst="rect">
             <a:avLst/>
@@ -3866,7 +3866,7 @@
         <p:spPr>
           <a:xfrm>
             <a:off x="2838450" y="2371725"/>
-            <a:ext cx="447675" cy="123825"/>
+            <a:ext cx="514350" cy="123825"/>
           </a:xfrm>
           <a:prstGeom prst="rect">
             <a:avLst/>
@@ -3938,7 +3938,7 @@
         <p:spPr>
           <a:xfrm>
             <a:off x="1552575" y="3457575"/>
-            <a:ext cx="552450" cy="123825"/>
+            <a:ext cx="685800" cy="123825"/>
           </a:xfrm>
           <a:prstGeom prst="rect">
             <a:avLst/>
@@ -4010,7 +4010,7 @@
         <p:spPr>
           <a:xfrm>
             <a:off x="4124325" y="3028950"/>
-            <a:ext cx="200025" cy="123825"/>
+            <a:ext cx="247650" cy="123825"/>
           </a:xfrm>
           <a:prstGeom prst="rect">
             <a:avLst/>
